--- a/S1-CL3-Cloud-Infrastructure-Improvement/delivery/topic_01/Topic_01_Slides.pptx
+++ b/S1-CL3-Cloud-Infrastructure-Improvement/delivery/topic_01/Topic_01_Slides.pptx
@@ -1045,7 +1045,12 @@
           </a:p>
           <a:p>
             <a:r>
-              <a:t>The workbook's task 1 runs the same reading on the practice engagement.</a:t>
+              <a:t>Note what is ABSENT as well as what is present — a missing tier is a finding, not a blank.</a:t>
+            </a:r>
+          </a:p>
+          <a:p>
+            <a:r>
+              <a:t>The workbook's task 1 runs the same reading, on this same engagement.</a:t>
             </a:r>
           </a:p>
         </p:txBody>
@@ -1115,12 +1120,12 @@
           <a:lstStyle/>
           <a:p>
             <a:r>
-              <a:t>Push from event to cost: "the server goes down" is technical; "billing halts at month-end" is impact.</a:t>
-            </a:r>
-          </a:p>
-          <a:p>
-            <a:r>
-              <a:t>Plant the constraint deliberately — it is the cost-benefit centrepiece of Topic 3.</a:t>
+              <a:t>Push from event to cost: "the server goes down" is technical; "the course catalogue is offline during an advertising campaign" is impact.</a:t>
+            </a:r>
+          </a:p>
+          <a:p>
+            <a:r>
+              <a:t>Ask what a public audience changes about impact compared with a staff-only system — that contrast is the reasoning their assessment needs.</a:t>
             </a:r>
           </a:p>
         </p:txBody>
@@ -8846,7 +8851,38 @@
                 </a:solidFill>
                 <a:latin typeface="Roboto"/>
               </a:rPr>
-              <a:t>Vehicle: Ledgerline, YAT's Accounting system, runs single-AZ in the cloud — the system you analyse and improve.</a:t>
+              <a:t>We work the YAT public website engagement — a real single-AZ system with a real improvement to argue for.</a:t>
+            </a:r>
+          </a:p>
+          <a:p>
+            <a:pPr marL="0" indent="0">
+              <a:lnSpc>
+                <a:spcPct val="105000"/>
+              </a:lnSpc>
+              <a:spcBef>
+                <a:spcPts val="0"/>
+              </a:spcBef>
+              <a:spcAft>
+                <a:spcPts val="1000"/>
+              </a:spcAft>
+            </a:pPr>
+            <a:r>
+              <a:rPr sz="1700" b="1" i="0">
+                <a:solidFill>
+                  <a:srgbClr val="EDAB0C"/>
+                </a:solidFill>
+                <a:latin typeface="Roboto"/>
+              </a:rPr>
+              <a:t>■  </a:t>
+            </a:r>
+            <a:r>
+              <a:rPr sz="1700" b="0" i="0">
+                <a:solidFill>
+                  <a:srgbClr val="2A2929"/>
+                </a:solidFill>
+                <a:latin typeface="Roboto"/>
+              </a:rPr>
+              <a:t>Your assessment runs the same method on a different YAT system. Same reasoning, different answers.</a:t>
             </a:r>
           </a:p>
           <a:p>
@@ -11616,7 +11652,7 @@
                 </a:solidFill>
                 <a:latin typeface="Roboto"/>
               </a:rPr>
-              <a:t>Review the Ledgerline baseline</a:t>
+              <a:t>Review the website baseline</a:t>
             </a:r>
           </a:p>
         </p:txBody>
@@ -11714,7 +11750,7 @@
                 </a:solidFill>
                 <a:latin typeface="Roboto"/>
               </a:rPr>
-              <a:t>The current architecture: a VPC, one Availability Zone, an app tier and a single database.</a:t>
+              <a:t>The current architecture: a VPC, one Availability Zone, a single web instance and a single database.</a:t>
             </a:r>
           </a:p>
           <a:p>
@@ -11779,11 +11815,42 @@
               <a:t>Single-AZ means every tier shares one failure domain; one zone outage takes it all down.</a:t>
             </a:r>
           </a:p>
+          <a:p>
+            <a:pPr marL="0" indent="0">
+              <a:lnSpc>
+                <a:spcPct val="105000"/>
+              </a:lnSpc>
+              <a:spcBef>
+                <a:spcPts val="0"/>
+              </a:spcBef>
+              <a:spcAft>
+                <a:spcPts val="1000"/>
+              </a:spcAft>
+            </a:pPr>
+            <a:r>
+              <a:rPr sz="1700" b="1" i="0">
+                <a:solidFill>
+                  <a:srgbClr val="EDAB0C"/>
+                </a:solidFill>
+                <a:latin typeface="Roboto"/>
+              </a:rPr>
+              <a:t>■  </a:t>
+            </a:r>
+            <a:r>
+              <a:rPr sz="1700" b="0" i="0">
+                <a:solidFill>
+                  <a:srgbClr val="2A2929"/>
+                </a:solidFill>
+                <a:latin typeface="Roboto"/>
+              </a:rPr>
+              <a:t>There is no load balancer and no Auto Scaling group — one instance is the entire website.</a:t>
+            </a:r>
+          </a:p>
         </p:txBody>
       </p:sp>
       <p:pic>
         <p:nvPicPr>
-          <p:cNvPr id="5" name="Picture 4" descr="ledgerline-baseline.png"/>
+          <p:cNvPr id="5" name="Picture 4" descr="website-baseline.png"/>
           <p:cNvPicPr>
             <a:picLocks noChangeAspect="1"/>
           </p:cNvPicPr>
@@ -12080,7 +12147,7 @@
                 </a:solidFill>
                 <a:latin typeface="Roboto"/>
               </a:rPr>
-              <a:t>Evaluate the baseline and state the business impact of its design decisions — downtime, lost billing, risk to close-of-month.</a:t>
+              <a:t>Evaluate the baseline and state the business impact of its design decisions — downtime, lost enquiries, reputational exposure.</a:t>
             </a:r>
           </a:p>
           <a:p>
@@ -12111,7 +12178,7 @@
                 </a:solidFill>
                 <a:latin typeface="Roboto"/>
               </a:rPr>
-              <a:t>A seeded constraint surfaces here: the accounting product is vendor-certified single-instance only, so the database cannot go Multi-AZ. Record it — it drives the reliability design later.</a:t>
+              <a:t>The website is public and 24x7, so an outage is visible to prospective students the moment it happens.</a:t>
             </a:r>
           </a:p>
           <a:p>
